--- a/output/05-security-privacy/05-07-never-paste-into-ai.pptx
+++ b/output/05-security-privacy/05-07-never-paste-into-ai.pptx
@@ -31175,7 +31175,7 @@
                 </a:solidFill>
                 <a:latin typeface="Segoe UI"/>
               </a:rPr>
-              <a:t>The company cannot see, control or delete what was shared</a:t>
+              <a:t>It gives up the company's contractual, security and audit controls</a:t>
             </a:r>
           </a:p>
         </p:txBody>
@@ -34434,7 +34434,7 @@
                 </a:solidFill>
                 <a:latin typeface="Segoe UI Semibold"/>
               </a:rPr>
-              <a:t>YOU CHOSE  B.  The company cannot see, control or delete what was shared</a:t>
+              <a:t>YOU CHOSE  B.  It gives up the company's contractual, security and audit controls</a:t>
             </a:r>
           </a:p>
         </p:txBody>
@@ -34479,7 +34479,7 @@
                 </a:solidFill>
                 <a:latin typeface="Segoe UI"/>
               </a:rPr>
-              <a:t>That is the real difference. A work account brings an agreement, a record, and somebody who can act when a mistake happens. A personal account brings none of that, and the trail ends at you.</a:t>
+              <a:t>That is the real difference. A work account brings an agreement, a record, and somebody who can act when a mistake happens. A personal account may provide none of that, and the trail ends at you.</a:t>
             </a:r>
           </a:p>
         </p:txBody>
@@ -62597,7 +62597,7 @@
                 </a:solidFill>
                 <a:latin typeface="Segoe UI"/>
               </a:rPr>
-              <a:t>An AI service the company holds an agreement with, signed into using your work account.</a:t>
+              <a:t>The tool, account and use the company has actually approved — not just any work login.</a:t>
             </a:r>
           </a:p>
         </p:txBody>

--- a/output/05-security-privacy/05-07-never-paste-into-ai.pptx
+++ b/output/05-security-privacy/05-07-never-paste-into-ai.pptx
@@ -56206,7 +56206,7 @@
                 </a:solidFill>
                 <a:latin typeface="Segoe UI Semibold"/>
               </a:rPr>
-              <a:t>The account decides accountability</a:t>
+              <a:t>Approval is more than an account</a:t>
             </a:r>
           </a:p>
         </p:txBody>
@@ -56251,7 +56251,7 @@
                 </a:solidFill>
                 <a:latin typeface="Segoe UI"/>
               </a:rPr>
-              <a:t>Work account, under a company agreement, every single time.</a:t>
+              <a:t>The specific tool, account and use all need approval — not just a work login.</a:t>
             </a:r>
           </a:p>
         </p:txBody>
